--- a/HCG_Automated_Draft.pptx
+++ b/HCG_Automated_Draft.pptx
@@ -9515,7 +9515,9 @@
           <a:prstGeom prst="roundRect">
             <a:avLst/>
           </a:prstGeom>
-          <a:noFill/>
+          <a:solidFill>
+            <a:srgbClr val="921F0B"/>
+          </a:solidFill>
           <a:ln>
             <a:noFill/>
           </a:ln>
@@ -9570,7 +9572,9 @@
           <a:prstGeom prst="roundRect">
             <a:avLst/>
           </a:prstGeom>
-          <a:noFill/>
+          <a:solidFill>
+            <a:srgbClr val="404040"/>
+          </a:solidFill>
           <a:ln>
             <a:noFill/>
           </a:ln>
@@ -10141,7 +10145,9 @@
           <a:prstGeom prst="roundRect">
             <a:avLst/>
           </a:prstGeom>
-          <a:noFill/>
+          <a:solidFill>
+            <a:srgbClr val="921F0B"/>
+          </a:solidFill>
           <a:ln>
             <a:noFill/>
           </a:ln>
@@ -10284,7 +10290,9 @@
           <a:prstGeom prst="roundRect">
             <a:avLst/>
           </a:prstGeom>
-          <a:noFill/>
+          <a:solidFill>
+            <a:srgbClr val="921F0B"/>
+          </a:solidFill>
           <a:ln>
             <a:noFill/>
           </a:ln>
@@ -10427,7 +10435,9 @@
           <a:prstGeom prst="roundRect">
             <a:avLst/>
           </a:prstGeom>
-          <a:noFill/>
+          <a:solidFill>
+            <a:srgbClr val="921F0B"/>
+          </a:solidFill>
           <a:ln>
             <a:noFill/>
           </a:ln>
@@ -10570,7 +10580,9 @@
           <a:prstGeom prst="roundRect">
             <a:avLst/>
           </a:prstGeom>
-          <a:noFill/>
+          <a:solidFill>
+            <a:srgbClr val="921F0B"/>
+          </a:solidFill>
           <a:ln>
             <a:noFill/>
           </a:ln>
@@ -11190,7 +11202,9 @@
           <a:prstGeom prst="roundRect">
             <a:avLst/>
           </a:prstGeom>
-          <a:noFill/>
+          <a:solidFill>
+            <a:srgbClr val="921F0B"/>
+          </a:solidFill>
           <a:ln>
             <a:noFill/>
           </a:ln>
@@ -11333,7 +11347,9 @@
           <a:prstGeom prst="roundRect">
             <a:avLst/>
           </a:prstGeom>
-          <a:noFill/>
+          <a:solidFill>
+            <a:srgbClr val="921F0B"/>
+          </a:solidFill>
           <a:ln>
             <a:noFill/>
           </a:ln>
@@ -11476,7 +11492,9 @@
           <a:prstGeom prst="roundRect">
             <a:avLst/>
           </a:prstGeom>
-          <a:noFill/>
+          <a:solidFill>
+            <a:srgbClr val="921F0B"/>
+          </a:solidFill>
           <a:ln>
             <a:noFill/>
           </a:ln>
@@ -11619,7 +11637,9 @@
           <a:prstGeom prst="roundRect">
             <a:avLst/>
           </a:prstGeom>
-          <a:noFill/>
+          <a:solidFill>
+            <a:srgbClr val="921F0B"/>
+          </a:solidFill>
           <a:ln>
             <a:noFill/>
           </a:ln>
@@ -11762,7 +11782,9 @@
           <a:prstGeom prst="roundRect">
             <a:avLst/>
           </a:prstGeom>
-          <a:noFill/>
+          <a:solidFill>
+            <a:srgbClr val="921F0B"/>
+          </a:solidFill>
           <a:ln>
             <a:noFill/>
           </a:ln>
@@ -12122,7 +12144,9 @@
           <a:prstGeom prst="roundRect">
             <a:avLst/>
           </a:prstGeom>
-          <a:noFill/>
+          <a:solidFill>
+            <a:srgbClr val="921F0B"/>
+          </a:solidFill>
           <a:ln>
             <a:noFill/>
           </a:ln>
@@ -12177,7 +12201,9 @@
           <a:prstGeom prst="roundRect">
             <a:avLst/>
           </a:prstGeom>
-          <a:noFill/>
+          <a:solidFill>
+            <a:srgbClr val="404040"/>
+          </a:solidFill>
           <a:ln>
             <a:noFill/>
           </a:ln>
@@ -14667,7 +14693,9 @@
           <a:prstGeom prst="roundRect">
             <a:avLst/>
           </a:prstGeom>
-          <a:noFill/>
+          <a:solidFill>
+            <a:srgbClr val="921F0B"/>
+          </a:solidFill>
           <a:ln>
             <a:noFill/>
           </a:ln>
@@ -14810,7 +14838,9 @@
           <a:prstGeom prst="roundRect">
             <a:avLst/>
           </a:prstGeom>
-          <a:noFill/>
+          <a:solidFill>
+            <a:srgbClr val="921F0B"/>
+          </a:solidFill>
           <a:ln>
             <a:noFill/>
           </a:ln>
@@ -14953,7 +14983,9 @@
           <a:prstGeom prst="roundRect">
             <a:avLst/>
           </a:prstGeom>
-          <a:noFill/>
+          <a:solidFill>
+            <a:srgbClr val="921F0B"/>
+          </a:solidFill>
           <a:ln>
             <a:noFill/>
           </a:ln>
@@ -15096,7 +15128,9 @@
           <a:prstGeom prst="roundRect">
             <a:avLst/>
           </a:prstGeom>
-          <a:noFill/>
+          <a:solidFill>
+            <a:srgbClr val="921F0B"/>
+          </a:solidFill>
           <a:ln>
             <a:noFill/>
           </a:ln>
@@ -15239,7 +15273,9 @@
           <a:prstGeom prst="roundRect">
             <a:avLst/>
           </a:prstGeom>
-          <a:noFill/>
+          <a:solidFill>
+            <a:srgbClr val="921F0B"/>
+          </a:solidFill>
           <a:ln>
             <a:noFill/>
           </a:ln>
@@ -15399,7 +15435,9 @@
           <a:prstGeom prst="roundRect">
             <a:avLst/>
           </a:prstGeom>
-          <a:noFill/>
+          <a:solidFill>
+            <a:srgbClr val="921F0B"/>
+          </a:solidFill>
           <a:ln>
             <a:noFill/>
           </a:ln>
@@ -15454,7 +15492,9 @@
           <a:prstGeom prst="roundRect">
             <a:avLst/>
           </a:prstGeom>
-          <a:noFill/>
+          <a:solidFill>
+            <a:srgbClr val="404040"/>
+          </a:solidFill>
           <a:ln>
             <a:noFill/>
           </a:ln>
@@ -17785,7 +17825,9 @@
           <a:prstGeom prst="roundRect">
             <a:avLst/>
           </a:prstGeom>
-          <a:noFill/>
+          <a:solidFill>
+            <a:srgbClr val="921F0B"/>
+          </a:solidFill>
           <a:ln>
             <a:noFill/>
           </a:ln>
@@ -17840,7 +17882,9 @@
           <a:prstGeom prst="roundRect">
             <a:avLst/>
           </a:prstGeom>
-          <a:noFill/>
+          <a:solidFill>
+            <a:srgbClr val="404040"/>
+          </a:solidFill>
           <a:ln>
             <a:noFill/>
           </a:ln>
@@ -18465,7 +18509,9 @@
           <a:prstGeom prst="roundRect">
             <a:avLst/>
           </a:prstGeom>
-          <a:noFill/>
+          <a:solidFill>
+            <a:srgbClr val="921F0B"/>
+          </a:solidFill>
           <a:ln>
             <a:noFill/>
           </a:ln>
@@ -18520,7 +18566,9 @@
           <a:prstGeom prst="roundRect">
             <a:avLst/>
           </a:prstGeom>
-          <a:noFill/>
+          <a:solidFill>
+            <a:srgbClr val="921F0B"/>
+          </a:solidFill>
           <a:ln>
             <a:noFill/>
           </a:ln>
@@ -18575,7 +18623,9 @@
           <a:prstGeom prst="roundRect">
             <a:avLst/>
           </a:prstGeom>
-          <a:noFill/>
+          <a:solidFill>
+            <a:srgbClr val="921F0B"/>
+          </a:solidFill>
           <a:ln>
             <a:noFill/>
           </a:ln>
@@ -18630,7 +18680,9 @@
           <a:prstGeom prst="roundRect">
             <a:avLst/>
           </a:prstGeom>
-          <a:noFill/>
+          <a:solidFill>
+            <a:srgbClr val="921F0B"/>
+          </a:solidFill>
           <a:ln>
             <a:noFill/>
           </a:ln>
@@ -18685,7 +18737,9 @@
           <a:prstGeom prst="roundRect">
             <a:avLst/>
           </a:prstGeom>
-          <a:noFill/>
+          <a:solidFill>
+            <a:srgbClr val="921F0B"/>
+          </a:solidFill>
           <a:ln>
             <a:noFill/>
           </a:ln>
@@ -19000,7 +19054,9 @@
           <a:prstGeom prst="roundRect">
             <a:avLst/>
           </a:prstGeom>
-          <a:noFill/>
+          <a:solidFill>
+            <a:srgbClr val="921F0B"/>
+          </a:solidFill>
           <a:ln>
             <a:noFill/>
           </a:ln>
@@ -19055,7 +19111,9 @@
           <a:prstGeom prst="roundRect">
             <a:avLst/>
           </a:prstGeom>
-          <a:noFill/>
+          <a:solidFill>
+            <a:srgbClr val="404040"/>
+          </a:solidFill>
           <a:ln>
             <a:noFill/>
           </a:ln>
@@ -19626,7 +19684,9 @@
           <a:prstGeom prst="roundRect">
             <a:avLst/>
           </a:prstGeom>
-          <a:noFill/>
+          <a:solidFill>
+            <a:srgbClr val="921F0B"/>
+          </a:solidFill>
           <a:ln>
             <a:noFill/>
           </a:ln>
@@ -19769,7 +19829,9 @@
           <a:prstGeom prst="roundRect">
             <a:avLst/>
           </a:prstGeom>
-          <a:noFill/>
+          <a:solidFill>
+            <a:srgbClr val="921F0B"/>
+          </a:solidFill>
           <a:ln>
             <a:noFill/>
           </a:ln>
@@ -19912,7 +19974,9 @@
           <a:prstGeom prst="roundRect">
             <a:avLst/>
           </a:prstGeom>
-          <a:noFill/>
+          <a:solidFill>
+            <a:srgbClr val="921F0B"/>
+          </a:solidFill>
           <a:ln>
             <a:noFill/>
           </a:ln>
@@ -20055,7 +20119,9 @@
           <a:prstGeom prst="roundRect">
             <a:avLst/>
           </a:prstGeom>
-          <a:noFill/>
+          <a:solidFill>
+            <a:srgbClr val="921F0B"/>
+          </a:solidFill>
           <a:ln>
             <a:noFill/>
           </a:ln>
@@ -20875,7 +20941,9 @@
           <a:prstGeom prst="roundRect">
             <a:avLst/>
           </a:prstGeom>
-          <a:noFill/>
+          <a:solidFill>
+            <a:srgbClr val="921F0B"/>
+          </a:solidFill>
           <a:ln>
             <a:noFill/>
           </a:ln>
@@ -21018,7 +21086,9 @@
           <a:prstGeom prst="roundRect">
             <a:avLst/>
           </a:prstGeom>
-          <a:noFill/>
+          <a:solidFill>
+            <a:srgbClr val="921F0B"/>
+          </a:solidFill>
           <a:ln>
             <a:noFill/>
           </a:ln>
@@ -21161,7 +21231,9 @@
           <a:prstGeom prst="roundRect">
             <a:avLst/>
           </a:prstGeom>
-          <a:noFill/>
+          <a:solidFill>
+            <a:srgbClr val="921F0B"/>
+          </a:solidFill>
           <a:ln>
             <a:noFill/>
           </a:ln>
@@ -21304,7 +21376,9 @@
           <a:prstGeom prst="roundRect">
             <a:avLst/>
           </a:prstGeom>
-          <a:noFill/>
+          <a:solidFill>
+            <a:srgbClr val="921F0B"/>
+          </a:solidFill>
           <a:ln>
             <a:noFill/>
           </a:ln>

--- a/HCG_Automated_Draft.pptx
+++ b/HCG_Automated_Draft.pptx
@@ -2896,7 +2896,7 @@
           <a:p>
             <a:pPr algn="l"/>
             <a:r>
-              <a:rPr sz="1800" b="1" i="0">
+              <a:rPr sz="1800" b="1" i="0" spc="-30">
                 <a:solidFill>
                   <a:srgbClr val="C72128"/>
                 </a:solidFill>
@@ -3129,7 +3129,7 @@
           <a:p>
             <a:pPr algn="l"/>
             <a:r>
-              <a:rPr sz="1800" b="0" i="0">
+              <a:rPr sz="1800" b="0" i="0" spc="-30">
                 <a:solidFill>
                   <a:srgbClr val="000000"/>
                 </a:solidFill>
@@ -3319,7 +3319,7 @@
           <a:p>
             <a:pPr algn="l"/>
             <a:r>
-              <a:rPr sz="1800" b="0" i="0">
+              <a:rPr sz="1800" b="0" i="0" spc="-30">
                 <a:solidFill>
                   <a:srgbClr val="000000"/>
                 </a:solidFill>
@@ -3579,7 +3579,7 @@
           <a:p>
             <a:pPr algn="l"/>
             <a:r>
-              <a:rPr sz="1800" b="0" i="0">
+              <a:rPr sz="1800" b="0" i="0" spc="-30">
                 <a:solidFill>
                   <a:srgbClr val="000000"/>
                 </a:solidFill>
@@ -3769,7 +3769,7 @@
           <a:p>
             <a:pPr algn="l"/>
             <a:r>
-              <a:rPr sz="1800" b="1" i="0">
+              <a:rPr sz="1800" b="1" i="0" spc="-30">
                 <a:solidFill>
                   <a:srgbClr val="C72128"/>
                 </a:solidFill>
@@ -4002,7 +4002,7 @@
           <a:p>
             <a:pPr algn="l"/>
             <a:r>
-              <a:rPr sz="1800" b="0" i="0">
+              <a:rPr sz="1800" b="0" i="0" spc="-30">
                 <a:solidFill>
                   <a:srgbClr val="000000"/>
                 </a:solidFill>
@@ -4162,12 +4162,19 @@
           </a:fontRef>
         </p:style>
         <p:txBody>
-          <a:bodyPr rtlCol="0" anchor="ctr"/>
+          <a:bodyPr rtlCol="0" anchor="ctr">
+            <a:normAutofit/>
+          </a:bodyPr>
           <a:lstStyle/>
           <a:p>
             <a:pPr algn="ctr"/>
             <a:r>
-              <a:rPr sz="1200" b="1" i="0">
+              <a:rPr sz="1200" b="1" i="0" spc="-30">
+                <a:ln w="6350">
+                  <a:solidFill>
+                    <a:srgbClr val="FFFFFF"/>
+                  </a:solidFill>
+                </a:ln>
                 <a:solidFill>
                   <a:srgbClr val="FFFFFF"/>
                 </a:solidFill>
@@ -4197,17 +4204,17 @@
         </p:spPr>
         <p:txBody>
           <a:bodyPr wrap="square" lIns="36576" rIns="36576" tIns="27432" bIns="27432">
-            <a:spAutoFit/>
+            <a:normAutofit/>
           </a:bodyPr>
           <a:lstStyle/>
           <a:p>
             <a:pPr algn="l">
               <a:lnSpc>
-                <a:spcPct val="118000"/>
+                <a:spcPct val="116000"/>
               </a:lnSpc>
             </a:pPr>
             <a:r>
-              <a:rPr sz="1050" b="0" i="0">
+              <a:rPr sz="1050" b="0" i="0" spc="-20">
                 <a:solidFill>
                   <a:srgbClr val="404040"/>
                 </a:solidFill>
@@ -4220,11 +4227,11 @@
           <a:p>
             <a:pPr algn="l">
               <a:lnSpc>
-                <a:spcPct val="118000"/>
+                <a:spcPct val="116000"/>
               </a:lnSpc>
             </a:pPr>
             <a:r>
-              <a:rPr sz="1050" b="0" i="0">
+              <a:rPr sz="1050" b="0" i="0" spc="-20">
                 <a:solidFill>
                   <a:srgbClr val="404040"/>
                 </a:solidFill>
@@ -4324,12 +4331,19 @@
           </a:fontRef>
         </p:style>
         <p:txBody>
-          <a:bodyPr rtlCol="0" anchor="ctr"/>
+          <a:bodyPr rtlCol="0" anchor="ctr">
+            <a:normAutofit/>
+          </a:bodyPr>
           <a:lstStyle/>
           <a:p>
             <a:pPr algn="ctr"/>
             <a:r>
-              <a:rPr sz="1200" b="1" i="0">
+              <a:rPr sz="1200" b="1" i="0" spc="-30">
+                <a:ln w="6350">
+                  <a:solidFill>
+                    <a:srgbClr val="FFFFFF"/>
+                  </a:solidFill>
+                </a:ln>
                 <a:solidFill>
                   <a:srgbClr val="FFFFFF"/>
                 </a:solidFill>
@@ -4359,17 +4373,17 @@
         </p:spPr>
         <p:txBody>
           <a:bodyPr wrap="square" lIns="36576" rIns="36576" tIns="27432" bIns="27432">
-            <a:spAutoFit/>
+            <a:normAutofit/>
           </a:bodyPr>
           <a:lstStyle/>
           <a:p>
             <a:pPr algn="l">
               <a:lnSpc>
-                <a:spcPct val="118000"/>
+                <a:spcPct val="116000"/>
               </a:lnSpc>
             </a:pPr>
             <a:r>
-              <a:rPr sz="1050" b="0" i="0">
+              <a:rPr sz="1050" b="0" i="0" spc="-20">
                 <a:solidFill>
                   <a:srgbClr val="404040"/>
                 </a:solidFill>
@@ -4382,11 +4396,11 @@
           <a:p>
             <a:pPr algn="l">
               <a:lnSpc>
-                <a:spcPct val="118000"/>
+                <a:spcPct val="116000"/>
               </a:lnSpc>
             </a:pPr>
             <a:r>
-              <a:rPr sz="1050" b="0" i="0">
+              <a:rPr sz="1050" b="0" i="0" spc="-20">
                 <a:solidFill>
                   <a:srgbClr val="404040"/>
                 </a:solidFill>
@@ -4486,12 +4500,19 @@
           </a:fontRef>
         </p:style>
         <p:txBody>
-          <a:bodyPr rtlCol="0" anchor="ctr"/>
+          <a:bodyPr rtlCol="0" anchor="ctr">
+            <a:normAutofit/>
+          </a:bodyPr>
           <a:lstStyle/>
           <a:p>
             <a:pPr algn="ctr"/>
             <a:r>
-              <a:rPr sz="1200" b="1" i="0">
+              <a:rPr sz="1200" b="1" i="0" spc="-30">
+                <a:ln w="6350">
+                  <a:solidFill>
+                    <a:srgbClr val="FFFFFF"/>
+                  </a:solidFill>
+                </a:ln>
                 <a:solidFill>
                   <a:srgbClr val="FFFFFF"/>
                 </a:solidFill>
@@ -4521,17 +4542,17 @@
         </p:spPr>
         <p:txBody>
           <a:bodyPr wrap="square" lIns="36576" rIns="36576" tIns="27432" bIns="27432">
-            <a:spAutoFit/>
+            <a:normAutofit/>
           </a:bodyPr>
           <a:lstStyle/>
           <a:p>
             <a:pPr algn="l">
               <a:lnSpc>
-                <a:spcPct val="118000"/>
+                <a:spcPct val="116000"/>
               </a:lnSpc>
             </a:pPr>
             <a:r>
-              <a:rPr sz="1050" b="0" i="0">
+              <a:rPr sz="1050" b="0" i="0" spc="-20">
                 <a:solidFill>
                   <a:srgbClr val="404040"/>
                 </a:solidFill>
@@ -4544,11 +4565,11 @@
           <a:p>
             <a:pPr algn="l">
               <a:lnSpc>
-                <a:spcPct val="118000"/>
+                <a:spcPct val="116000"/>
               </a:lnSpc>
             </a:pPr>
             <a:r>
-              <a:rPr sz="1050" b="0" i="0">
+              <a:rPr sz="1050" b="0" i="0" spc="-20">
                 <a:solidFill>
                   <a:srgbClr val="404040"/>
                 </a:solidFill>
@@ -4593,7 +4614,7 @@
             <a:r>
               <a:rPr sz="1100" b="1" i="1">
                 <a:solidFill>
-                  <a:srgbClr val="921F0B"/>
+                  <a:srgbClr val="C72128"/>
                 </a:solidFill>
                 <a:latin typeface="맑은 고딕"/>
                 <a:ea typeface="맑은 고딕"/>
@@ -4808,12 +4829,19 @@
           </a:fontRef>
         </p:style>
         <p:txBody>
-          <a:bodyPr rtlCol="0" anchor="ctr"/>
+          <a:bodyPr rtlCol="0" anchor="ctr">
+            <a:normAutofit/>
+          </a:bodyPr>
           <a:lstStyle/>
           <a:p>
             <a:pPr algn="ctr"/>
             <a:r>
-              <a:rPr sz="1100" b="1" i="0">
+              <a:rPr sz="1100" b="1" i="0" spc="-30">
+                <a:ln w="6350">
+                  <a:solidFill>
+                    <a:srgbClr val="FFFFFF"/>
+                  </a:solidFill>
+                </a:ln>
                 <a:solidFill>
                   <a:srgbClr val="FFFFFF"/>
                 </a:solidFill>
@@ -4843,17 +4871,17 @@
         </p:spPr>
         <p:txBody>
           <a:bodyPr wrap="square" lIns="36576" rIns="36576" tIns="27432" bIns="27432">
-            <a:spAutoFit/>
+            <a:normAutofit/>
           </a:bodyPr>
           <a:lstStyle/>
           <a:p>
             <a:pPr algn="l">
               <a:lnSpc>
-                <a:spcPct val="118000"/>
+                <a:spcPct val="116000"/>
               </a:lnSpc>
             </a:pPr>
             <a:r>
-              <a:rPr sz="950" b="0" i="0">
+              <a:rPr sz="950" b="0" i="0" spc="-20">
                 <a:solidFill>
                   <a:srgbClr val="404040"/>
                 </a:solidFill>
@@ -4953,12 +4981,19 @@
           </a:fontRef>
         </p:style>
         <p:txBody>
-          <a:bodyPr rtlCol="0" anchor="ctr"/>
+          <a:bodyPr rtlCol="0" anchor="ctr">
+            <a:normAutofit/>
+          </a:bodyPr>
           <a:lstStyle/>
           <a:p>
             <a:pPr algn="ctr"/>
             <a:r>
-              <a:rPr sz="1100" b="1" i="0">
+              <a:rPr sz="1100" b="1" i="0" spc="-30">
+                <a:ln w="6350">
+                  <a:solidFill>
+                    <a:srgbClr val="FFFFFF"/>
+                  </a:solidFill>
+                </a:ln>
                 <a:solidFill>
                   <a:srgbClr val="FFFFFF"/>
                 </a:solidFill>
@@ -4988,17 +5023,17 @@
         </p:spPr>
         <p:txBody>
           <a:bodyPr wrap="square" lIns="36576" rIns="36576" tIns="27432" bIns="27432">
-            <a:spAutoFit/>
+            <a:normAutofit/>
           </a:bodyPr>
           <a:lstStyle/>
           <a:p>
             <a:pPr algn="l">
               <a:lnSpc>
-                <a:spcPct val="118000"/>
+                <a:spcPct val="116000"/>
               </a:lnSpc>
             </a:pPr>
             <a:r>
-              <a:rPr sz="950" b="0" i="0">
+              <a:rPr sz="950" b="0" i="0" spc="-20">
                 <a:solidFill>
                   <a:srgbClr val="404040"/>
                 </a:solidFill>
@@ -5098,12 +5133,19 @@
           </a:fontRef>
         </p:style>
         <p:txBody>
-          <a:bodyPr rtlCol="0" anchor="ctr"/>
+          <a:bodyPr rtlCol="0" anchor="ctr">
+            <a:normAutofit/>
+          </a:bodyPr>
           <a:lstStyle/>
           <a:p>
             <a:pPr algn="ctr"/>
             <a:r>
-              <a:rPr sz="1100" b="1" i="0">
+              <a:rPr sz="1100" b="1" i="0" spc="-30">
+                <a:ln w="6350">
+                  <a:solidFill>
+                    <a:srgbClr val="FFFFFF"/>
+                  </a:solidFill>
+                </a:ln>
                 <a:solidFill>
                   <a:srgbClr val="FFFFFF"/>
                 </a:solidFill>
@@ -5133,17 +5175,17 @@
         </p:spPr>
         <p:txBody>
           <a:bodyPr wrap="square" lIns="36576" rIns="36576" tIns="27432" bIns="27432">
-            <a:spAutoFit/>
+            <a:normAutofit/>
           </a:bodyPr>
           <a:lstStyle/>
           <a:p>
             <a:pPr algn="l">
               <a:lnSpc>
-                <a:spcPct val="118000"/>
+                <a:spcPct val="116000"/>
               </a:lnSpc>
             </a:pPr>
             <a:r>
-              <a:rPr sz="950" b="0" i="0">
+              <a:rPr sz="950" b="0" i="0" spc="-20">
                 <a:solidFill>
                   <a:srgbClr val="404040"/>
                 </a:solidFill>
@@ -5243,12 +5285,19 @@
           </a:fontRef>
         </p:style>
         <p:txBody>
-          <a:bodyPr rtlCol="0" anchor="ctr"/>
+          <a:bodyPr rtlCol="0" anchor="ctr">
+            <a:normAutofit/>
+          </a:bodyPr>
           <a:lstStyle/>
           <a:p>
             <a:pPr algn="ctr"/>
             <a:r>
-              <a:rPr sz="1100" b="1" i="0">
+              <a:rPr sz="1100" b="1" i="0" spc="-30">
+                <a:ln w="6350">
+                  <a:solidFill>
+                    <a:srgbClr val="FFFFFF"/>
+                  </a:solidFill>
+                </a:ln>
                 <a:solidFill>
                   <a:srgbClr val="FFFFFF"/>
                 </a:solidFill>
@@ -5278,17 +5327,17 @@
         </p:spPr>
         <p:txBody>
           <a:bodyPr wrap="square" lIns="36576" rIns="36576" tIns="27432" bIns="27432">
-            <a:spAutoFit/>
+            <a:normAutofit/>
           </a:bodyPr>
           <a:lstStyle/>
           <a:p>
             <a:pPr algn="l">
               <a:lnSpc>
-                <a:spcPct val="118000"/>
+                <a:spcPct val="116000"/>
               </a:lnSpc>
             </a:pPr>
             <a:r>
-              <a:rPr sz="950" b="0" i="0">
+              <a:rPr sz="950" b="0" i="0" spc="-20">
                 <a:solidFill>
                   <a:srgbClr val="404040"/>
                 </a:solidFill>
@@ -5428,13 +5477,13 @@
         </p:spPr>
         <p:txBody>
           <a:bodyPr wrap="square" lIns="36576" rIns="36576" tIns="27432" bIns="27432">
-            <a:spAutoFit/>
+            <a:normAutofit/>
           </a:bodyPr>
           <a:lstStyle/>
           <a:p>
             <a:pPr algn="l"/>
             <a:r>
-              <a:rPr sz="1050" b="1" i="0">
+              <a:rPr sz="1050" b="1" i="0" spc="-20">
                 <a:solidFill>
                   <a:srgbClr val="C72128"/>
                 </a:solidFill>
@@ -5451,7 +5500,7 @@
               </a:lnSpc>
             </a:pPr>
             <a:r>
-              <a:rPr sz="950" b="0" i="0">
+              <a:rPr sz="950" b="0" i="0" spc="-20">
                 <a:solidFill>
                   <a:srgbClr val="404040"/>
                 </a:solidFill>
@@ -5481,13 +5530,13 @@
         </p:spPr>
         <p:txBody>
           <a:bodyPr wrap="square" lIns="36576" rIns="36576" tIns="27432" bIns="27432">
-            <a:spAutoFit/>
+            <a:normAutofit/>
           </a:bodyPr>
           <a:lstStyle/>
           <a:p>
             <a:pPr algn="l"/>
             <a:r>
-              <a:rPr sz="1050" b="1" i="0">
+              <a:rPr sz="1050" b="1" i="0" spc="-20">
                 <a:solidFill>
                   <a:srgbClr val="C72128"/>
                 </a:solidFill>
@@ -5504,7 +5553,7 @@
               </a:lnSpc>
             </a:pPr>
             <a:r>
-              <a:rPr sz="950" b="0" i="0">
+              <a:rPr sz="950" b="0" i="0" spc="-20">
                 <a:solidFill>
                   <a:srgbClr val="404040"/>
                 </a:solidFill>
@@ -5534,13 +5583,13 @@
         </p:spPr>
         <p:txBody>
           <a:bodyPr wrap="square" lIns="36576" rIns="36576" tIns="27432" bIns="27432">
-            <a:spAutoFit/>
+            <a:normAutofit/>
           </a:bodyPr>
           <a:lstStyle/>
           <a:p>
             <a:pPr algn="l"/>
             <a:r>
-              <a:rPr sz="1050" b="1" i="0">
+              <a:rPr sz="1050" b="1" i="0" spc="-20">
                 <a:solidFill>
                   <a:srgbClr val="C72128"/>
                 </a:solidFill>
@@ -5557,7 +5606,7 @@
               </a:lnSpc>
             </a:pPr>
             <a:r>
-              <a:rPr sz="950" b="0" i="0">
+              <a:rPr sz="950" b="0" i="0" spc="-20">
                 <a:solidFill>
                   <a:srgbClr val="404040"/>
                 </a:solidFill>
